--- a/curriculum/M01/W06/L02/slides.pptx
+++ b/curriculum/M01/W06/L02/slides.pptx
@@ -15504,7 +15504,36 @@
                 <a:ea typeface="Malgun Gothic"/>
                 <a:cs typeface="Malgun Gothic"/>
               </a:rPr>
-              <a:t>Nucleosome의 위치도 무작위가 아니다. DNA의 굽힘 성질이 서열에 따라 다르므로 nucleosome이 앉기 쉬운 서열과 어려운 서열이 있고, 전사 개시점 바로 위쪽에는 nucleosome이 비어 있는 구간이 규칙적으로 나타난다. 이 nucleosome-free region의 존재가 전사인자의 접근을 가능하게 하며, M01-W06-L01에서 다룬 ATAC-seq이 측정하는 대상이 바로 이것이다. 양전하를 띠고, DNA의 음전하 인산 골격과 정전기적으로 결합한다. Histone의 N 말단 꼬리는 nucleosome 바깥으로 나와 있어 acetylation, methylation, phosphorylation을 받는다. Lysine의 acetylation은 양전하를 중화해 DNA와의 결합을 약하게 하고, 수식된 꼬리는 다른 단백질의 결합 표지가 된다. 이 수식과 전사 조절의 연결은 M01-W07-L02에서 다룬다.</a:t>
+              <a:t>Nucleosome의 위치도 무작위가 아니다. DNA의 굽힘 성질이 서열에 따라 다르므로 nucleosome이 앉기 쉬운 서열과 어려운 서열이 있고, 전사 개시점 바로 위쪽에는 nucleosome이 비어 있는 구간이 규칙적으로 나타난다. 이 nucleosome-free region의 존재가 전사인자의 접근을 가능하게 하며, M01-W06-L01에서 다룬 ATAC-seq이 측정하는 대상이 바로 이것이다.</a:t>
+            </a:r>
+          </a:p>
+          <a:p>
+            <a:pPr>
+              <a:spcAft>
+                <a:spcPts val="900"/>
+              </a:spcAft>
+            </a:pPr>
+            <a:r>
+              <a:rPr sz="1400" b="1" i="0">
+                <a:solidFill>
+                  <a:srgbClr val="F2B705"/>
+                </a:solidFill>
+                <a:latin typeface="Malgun Gothic"/>
+                <a:ea typeface="Malgun Gothic"/>
+                <a:cs typeface="Malgun Gothic"/>
+              </a:rPr>
+              <a:t>•  </a:t>
+            </a:r>
+            <a:r>
+              <a:rPr sz="1400" b="0" i="0">
+                <a:solidFill>
+                  <a:srgbClr val="11202B"/>
+                </a:solidFill>
+                <a:latin typeface="Malgun Gothic"/>
+                <a:ea typeface="Malgun Gothic"/>
+                <a:cs typeface="Malgun Gothic"/>
+              </a:rPr>
+              <a:t>Histone은 lysine과 arginine이 많아 양전하를 띠고, DNA의 음전하 인산 골격과 정전기적으로 결합한다. Histone의 N 말단 꼬리는 nucleosome 바깥으로 나와 있어 acetylation, methylation, phosphorylation을 받는다. Lysine의 acetylation은 양전하를 중화해 DNA와의 결합을 약하게 하고, 수식된 꼬리는 다른 단백질의 결합 표지가 된다. 이 수식과 전사 조절의 연결은 M01-W07-L02에서 다룬다.</a:t>
             </a:r>
           </a:p>
           <a:p>

--- a/curriculum/M01/W06/L02/slides.pptx
+++ b/curriculum/M01/W06/L02/slides.pptx
@@ -14743,7 +14743,7 @@
                 <a:ea typeface="Malgun Gothic"/>
                 <a:cs typeface="Malgun Gothic"/>
               </a:rPr>
-              <a:t>M01-W05-L03 유전정보의 흐름 — 전사 단위, mRNA 가공, 유전암호</a:t>
+              <a:t>M01-W05-L03 유전정보의 흐름: 복제·전사·번역 — 전사 단위, mRNA 가공, 유전암호</a:t>
             </a:r>
           </a:p>
           <a:p>
